--- a/assets/paper-figures/20260925-restored-f02/Figure2_F02_editable.pptx
+++ b/assets/paper-figures/20260925-restored-f02/Figure2_F02_editable.pptx
@@ -10424,7 +10424,7 @@
         <mc:Choice Requires="a16">
           <p:sp>
             <p:nvSpPr>
-              <p:cNvPr id="2" name="pi_t"/>
+              <p:cNvPr id="123" name="pi_t"/>
               <p:cNvSpPr txBox="1"/>
               <p:nvPr/>
             </p:nvSpPr>
@@ -10786,7 +10786,7 @@
         <mc:Choice Requires="a16">
           <p:sp>
             <p:nvSpPr>
-              <p:cNvPr id="2" name="gae"/>
+              <p:cNvPr id="126" name="gae"/>
               <p:cNvSpPr txBox="1"/>
               <p:nvPr/>
             </p:nvSpPr>
@@ -11798,7 +11798,7 @@
         <mc:Choice Requires="a16">
           <p:sp>
             <p:nvSpPr>
-              <p:cNvPr id="2" name="edge_inputs"/>
+              <p:cNvPr id="135" name="edge_inputs"/>
               <p:cNvSpPr txBox="1"/>
               <p:nvPr/>
             </p:nvSpPr>
@@ -12700,7 +12700,7 @@
         <mc:Choice Requires="a16">
           <p:sp>
             <p:nvSpPr>
-              <p:cNvPr id="2" name="soft_eq"/>
+              <p:cNvPr id="143" name="soft_eq"/>
               <p:cNvSpPr txBox="1"/>
               <p:nvPr/>
             </p:nvSpPr>
@@ -13840,7 +13840,7 @@
         <mc:Choice Requires="a16">
           <p:sp>
             <p:nvSpPr>
-              <p:cNvPr id="2" name="hard_eq"/>
+              <p:cNvPr id="153" name="hard_eq"/>
               <p:cNvSpPr txBox="1"/>
               <p:nvPr/>
             </p:nvSpPr>
@@ -14411,7 +14411,7 @@
         <mc:Choice Requires="a16">
           <p:sp>
             <p:nvSpPr>
-              <p:cNvPr id="2" name="objective"/>
+              <p:cNvPr id="158" name="objective"/>
               <p:cNvSpPr txBox="1"/>
               <p:nvPr/>
             </p:nvSpPr>
@@ -17047,7 +17047,7 @@
         <mc:Choice Requires="a16">
           <p:sp>
             <p:nvSpPr>
-              <p:cNvPr id="2" name="before_F"/>
+              <p:cNvPr id="181" name="before_F"/>
               <p:cNvSpPr txBox="1"/>
               <p:nvPr/>
             </p:nvSpPr>
@@ -17333,7 +17333,7 @@
         <mc:Choice Requires="a16">
           <p:sp>
             <p:nvSpPr>
-              <p:cNvPr id="2" name="after_F"/>
+              <p:cNvPr id="184" name="after_F"/>
               <p:cNvSpPr txBox="1"/>
               <p:nvPr/>
             </p:nvSpPr>
@@ -17658,7 +17658,7 @@
         <mc:Choice Requires="a16">
           <p:sp>
             <p:nvSpPr>
-              <p:cNvPr id="2" name="beta_update"/>
+              <p:cNvPr id="187" name="beta_update"/>
               <p:cNvSpPr txBox="1"/>
               <p:nvPr/>
             </p:nvSpPr>
@@ -19935,7 +19935,7 @@
         <mc:Choice Requires="a16">
           <p:sp>
             <p:nvSpPr>
-              <p:cNvPr id="2" name="lambda_out"/>
+              <p:cNvPr id="206" name="lambda_out"/>
               <p:cNvSpPr txBox="1"/>
               <p:nvPr/>
             </p:nvSpPr>
@@ -21251,7 +21251,7 @@
         <mc:Choice Requires="a16">
           <p:sp>
             <p:nvSpPr>
-              <p:cNvPr id="2" name="advantage"/>
+              <p:cNvPr id="217" name="advantage"/>
               <p:cNvSpPr txBox="1"/>
               <p:nvPr/>
             </p:nvSpPr>
@@ -23943,7 +23943,7 @@
         <mc:Choice Requires="a16">
           <p:sp>
             <p:nvSpPr>
-              <p:cNvPr id="2" name="pi_next"/>
+              <p:cNvPr id="240" name="pi_next"/>
               <p:cNvSpPr txBox="1"/>
               <p:nvPr/>
             </p:nvSpPr>
@@ -24487,7 +24487,7 @@
         <mc:Choice Requires="a16">
           <p:sp>
             <p:nvSpPr>
-              <p:cNvPr id="2" name="filter_raw"/>
+              <p:cNvPr id="245" name="filter_raw"/>
               <p:cNvSpPr txBox="1"/>
               <p:nvPr/>
             </p:nvSpPr>
@@ -24948,7 +24948,7 @@
         <mc:Choice Requires="a16">
           <p:sp>
             <p:nvSpPr>
-              <p:cNvPr id="2" name="filter_processed"/>
+              <p:cNvPr id="249" name="filter_processed"/>
               <p:cNvSpPr txBox="1"/>
               <p:nvPr/>
             </p:nvSpPr>
